--- a/PPTs/Lecture 15 - Network Security.pptx
+++ b/PPTs/Lecture 15 - Network Security.pptx
@@ -28745,7 +28745,7 @@
               </a:buClr>
             </a:pPr>
             <a:r>
-              <a:rPr lang="en" sz="1600" kern="0" dirty="0">
+              <a:rPr lang="en" sz="1600" kern="0">
                 <a:solidFill>
                   <a:srgbClr val="BF9000"/>
                 </a:solidFill>
@@ -28754,7 +28754,7 @@
                 <a:cs typeface="Roboto Medium"/>
                 <a:sym typeface="Roboto Medium"/>
               </a:rPr>
-              <a:t>Lecture 14</a:t>
+              <a:t>Lecture 15</a:t>
             </a:r>
             <a:endParaRPr sz="1600" kern="0" dirty="0">
               <a:solidFill>
@@ -30089,14 +30089,14 @@
           </a:ln>
           <a:extLst>
             <a:ext uri="{909E8E84-426E-40dd-AFC4-6F175D3DCCD1}">
-              <a14:hiddenFill xmlns:a14="http://schemas.microsoft.com/office/drawing/2010/main" xmlns="">
+              <a14:hiddenFill xmlns="" xmlns:a14="http://schemas.microsoft.com/office/drawing/2010/main">
                 <a:solidFill>
                   <a:srgbClr val="FFFFFF"/>
                 </a:solidFill>
               </a14:hiddenFill>
             </a:ext>
             <a:ext uri="{91240B29-F687-4f45-9708-019B960494DF}">
-              <a14:hiddenLine xmlns:a14="http://schemas.microsoft.com/office/drawing/2010/main" xmlns="" w="9525">
+              <a14:hiddenLine xmlns="" xmlns:a14="http://schemas.microsoft.com/office/drawing/2010/main" w="9525">
                 <a:solidFill>
                   <a:srgbClr val="000000"/>
                 </a:solidFill>
@@ -30149,14 +30149,14 @@
           </a:ln>
           <a:extLst>
             <a:ext uri="{909E8E84-426E-40dd-AFC4-6F175D3DCCD1}">
-              <a14:hiddenFill xmlns:a14="http://schemas.microsoft.com/office/drawing/2010/main" xmlns="">
+              <a14:hiddenFill xmlns="" xmlns:a14="http://schemas.microsoft.com/office/drawing/2010/main">
                 <a:solidFill>
                   <a:srgbClr val="FFFFFF"/>
                 </a:solidFill>
               </a14:hiddenFill>
             </a:ext>
             <a:ext uri="{91240B29-F687-4f45-9708-019B960494DF}">
-              <a14:hiddenLine xmlns:a14="http://schemas.microsoft.com/office/drawing/2010/main" xmlns="" w="9525">
+              <a14:hiddenLine xmlns="" xmlns:a14="http://schemas.microsoft.com/office/drawing/2010/main" w="9525">
                 <a:solidFill>
                   <a:srgbClr val="000000"/>
                 </a:solidFill>
@@ -30285,14 +30285,14 @@
           </a:ln>
           <a:extLst>
             <a:ext uri="{909E8E84-426E-40dd-AFC4-6F175D3DCCD1}">
-              <a14:hiddenFill xmlns:a14="http://schemas.microsoft.com/office/drawing/2010/main" xmlns="">
+              <a14:hiddenFill xmlns="" xmlns:a14="http://schemas.microsoft.com/office/drawing/2010/main">
                 <a:solidFill>
                   <a:srgbClr val="FFFFFF"/>
                 </a:solidFill>
               </a14:hiddenFill>
             </a:ext>
             <a:ext uri="{91240B29-F687-4f45-9708-019B960494DF}">
-              <a14:hiddenLine xmlns:a14="http://schemas.microsoft.com/office/drawing/2010/main" xmlns="" w="9525">
+              <a14:hiddenLine xmlns="" xmlns:a14="http://schemas.microsoft.com/office/drawing/2010/main" w="9525">
                 <a:solidFill>
                   <a:srgbClr val="000000"/>
                 </a:solidFill>
@@ -30540,14 +30540,14 @@
             </a:ln>
             <a:extLst>
               <a:ext uri="{909E8E84-426E-40dd-AFC4-6F175D3DCCD1}">
-                <a14:hiddenFill xmlns:a14="http://schemas.microsoft.com/office/drawing/2010/main" xmlns="">
+                <a14:hiddenFill xmlns="" xmlns:a14="http://schemas.microsoft.com/office/drawing/2010/main">
                   <a:solidFill>
                     <a:srgbClr val="FFFFFF"/>
                   </a:solidFill>
                 </a14:hiddenFill>
               </a:ext>
               <a:ext uri="{91240B29-F687-4f45-9708-019B960494DF}">
-                <a14:hiddenLine xmlns:a14="http://schemas.microsoft.com/office/drawing/2010/main" xmlns="" w="9525">
+                <a14:hiddenLine xmlns="" xmlns:a14="http://schemas.microsoft.com/office/drawing/2010/main" w="9525">
                   <a:solidFill>
                     <a:srgbClr val="000000"/>
                   </a:solidFill>
@@ -30725,14 +30725,14 @@
           </a:ln>
           <a:extLst>
             <a:ext uri="{909E8E84-426E-40dd-AFC4-6F175D3DCCD1}">
-              <a14:hiddenFill xmlns:a14="http://schemas.microsoft.com/office/drawing/2010/main" xmlns="">
+              <a14:hiddenFill xmlns="" xmlns:a14="http://schemas.microsoft.com/office/drawing/2010/main">
                 <a:solidFill>
                   <a:srgbClr val="FFFFFF"/>
                 </a:solidFill>
               </a14:hiddenFill>
             </a:ext>
             <a:ext uri="{91240B29-F687-4f45-9708-019B960494DF}">
-              <a14:hiddenLine xmlns:a14="http://schemas.microsoft.com/office/drawing/2010/main" xmlns="" w="9525">
+              <a14:hiddenLine xmlns="" xmlns:a14="http://schemas.microsoft.com/office/drawing/2010/main" w="9525">
                 <a:solidFill>
                   <a:srgbClr val="000000"/>
                 </a:solidFill>
@@ -30899,7 +30899,7 @@
           </a:ln>
           <a:extLst>
             <a:ext uri="{909E8E84-426E-40dd-AFC4-6F175D3DCCD1}">
-              <a14:hiddenFill xmlns:a14="http://schemas.microsoft.com/office/drawing/2010/main" xmlns="">
+              <a14:hiddenFill xmlns="" xmlns:a14="http://schemas.microsoft.com/office/drawing/2010/main">
                 <a:noFill/>
               </a14:hiddenFill>
             </a:ext>
@@ -30946,7 +30946,7 @@
           </a:ln>
           <a:extLst>
             <a:ext uri="{909E8E84-426E-40dd-AFC4-6F175D3DCCD1}">
-              <a14:hiddenFill xmlns:a14="http://schemas.microsoft.com/office/drawing/2010/main" xmlns="">
+              <a14:hiddenFill xmlns="" xmlns:a14="http://schemas.microsoft.com/office/drawing/2010/main">
                 <a:noFill/>
               </a14:hiddenFill>
             </a:ext>
@@ -30988,14 +30988,14 @@
           </a:ln>
           <a:extLst>
             <a:ext uri="{909E8E84-426E-40dd-AFC4-6F175D3DCCD1}">
-              <a14:hiddenFill xmlns:a14="http://schemas.microsoft.com/office/drawing/2010/main" xmlns="">
+              <a14:hiddenFill xmlns="" xmlns:a14="http://schemas.microsoft.com/office/drawing/2010/main">
                 <a:solidFill>
                   <a:srgbClr val="FFFFFF"/>
                 </a:solidFill>
               </a14:hiddenFill>
             </a:ext>
             <a:ext uri="{91240B29-F687-4f45-9708-019B960494DF}">
-              <a14:hiddenLine xmlns:a14="http://schemas.microsoft.com/office/drawing/2010/main" xmlns="" w="9525">
+              <a14:hiddenLine xmlns="" xmlns:a14="http://schemas.microsoft.com/office/drawing/2010/main" w="9525">
                 <a:solidFill>
                   <a:srgbClr val="000000"/>
                 </a:solidFill>
@@ -31162,7 +31162,7 @@
           </a:ln>
           <a:extLst>
             <a:ext uri="{909E8E84-426E-40dd-AFC4-6F175D3DCCD1}">
-              <a14:hiddenFill xmlns:a14="http://schemas.microsoft.com/office/drawing/2010/main" xmlns="">
+              <a14:hiddenFill xmlns="" xmlns:a14="http://schemas.microsoft.com/office/drawing/2010/main">
                 <a:noFill/>
               </a14:hiddenFill>
             </a:ext>
@@ -31254,7 +31254,7 @@
           </a:ln>
           <a:extLst>
             <a:ext uri="{909E8E84-426E-40dd-AFC4-6F175D3DCCD1}">
-              <a14:hiddenFill xmlns:a14="http://schemas.microsoft.com/office/drawing/2010/main" xmlns="">
+              <a14:hiddenFill xmlns="" xmlns:a14="http://schemas.microsoft.com/office/drawing/2010/main">
                 <a:solidFill>
                   <a:srgbClr val="FFFFFF"/>
                 </a:solidFill>
@@ -31348,7 +31348,7 @@
           </a:ln>
           <a:extLst>
             <a:ext uri="{909E8E84-426E-40dd-AFC4-6F175D3DCCD1}">
-              <a14:hiddenFill xmlns:a14="http://schemas.microsoft.com/office/drawing/2010/main" xmlns="">
+              <a14:hiddenFill xmlns="" xmlns:a14="http://schemas.microsoft.com/office/drawing/2010/main">
                 <a:solidFill>
                   <a:srgbClr val="FFFFFF"/>
                 </a:solidFill>
@@ -31397,7 +31397,7 @@
           </a:ln>
           <a:extLst>
             <a:ext uri="{909E8E84-426E-40dd-AFC4-6F175D3DCCD1}">
-              <a14:hiddenFill xmlns:a14="http://schemas.microsoft.com/office/drawing/2010/main" xmlns="">
+              <a14:hiddenFill xmlns="" xmlns:a14="http://schemas.microsoft.com/office/drawing/2010/main">
                 <a:noFill/>
               </a14:hiddenFill>
             </a:ext>
@@ -31439,14 +31439,14 @@
           </a:ln>
           <a:extLst>
             <a:ext uri="{909E8E84-426E-40dd-AFC4-6F175D3DCCD1}">
-              <a14:hiddenFill xmlns:a14="http://schemas.microsoft.com/office/drawing/2010/main" xmlns="">
+              <a14:hiddenFill xmlns="" xmlns:a14="http://schemas.microsoft.com/office/drawing/2010/main">
                 <a:solidFill>
                   <a:srgbClr val="FFFFFF"/>
                 </a:solidFill>
               </a14:hiddenFill>
             </a:ext>
             <a:ext uri="{91240B29-F687-4f45-9708-019B960494DF}">
-              <a14:hiddenLine xmlns:a14="http://schemas.microsoft.com/office/drawing/2010/main" xmlns="" w="9525">
+              <a14:hiddenLine xmlns="" xmlns:a14="http://schemas.microsoft.com/office/drawing/2010/main" w="9525">
                 <a:solidFill>
                   <a:srgbClr val="000000"/>
                 </a:solidFill>
@@ -31613,7 +31613,7 @@
           </a:ln>
           <a:extLst>
             <a:ext uri="{909E8E84-426E-40dd-AFC4-6F175D3DCCD1}">
-              <a14:hiddenFill xmlns:a14="http://schemas.microsoft.com/office/drawing/2010/main" xmlns="">
+              <a14:hiddenFill xmlns="" xmlns:a14="http://schemas.microsoft.com/office/drawing/2010/main">
                 <a:noFill/>
               </a14:hiddenFill>
             </a:ext>
@@ -31655,14 +31655,14 @@
           </a:ln>
           <a:extLst>
             <a:ext uri="{909E8E84-426E-40dd-AFC4-6F175D3DCCD1}">
-              <a14:hiddenFill xmlns:a14="http://schemas.microsoft.com/office/drawing/2010/main" xmlns="">
+              <a14:hiddenFill xmlns="" xmlns:a14="http://schemas.microsoft.com/office/drawing/2010/main">
                 <a:solidFill>
                   <a:srgbClr val="FFFFFF"/>
                 </a:solidFill>
               </a14:hiddenFill>
             </a:ext>
             <a:ext uri="{91240B29-F687-4f45-9708-019B960494DF}">
-              <a14:hiddenLine xmlns:a14="http://schemas.microsoft.com/office/drawing/2010/main" xmlns="" w="9525">
+              <a14:hiddenLine xmlns="" xmlns:a14="http://schemas.microsoft.com/office/drawing/2010/main" w="9525">
                 <a:solidFill>
                   <a:srgbClr val="000000"/>
                 </a:solidFill>
@@ -31824,14 +31824,14 @@
           </a:ln>
           <a:extLst>
             <a:ext uri="{909E8E84-426E-40dd-AFC4-6F175D3DCCD1}">
-              <a14:hiddenFill xmlns:a14="http://schemas.microsoft.com/office/drawing/2010/main" xmlns="">
+              <a14:hiddenFill xmlns="" xmlns:a14="http://schemas.microsoft.com/office/drawing/2010/main">
                 <a:solidFill>
                   <a:srgbClr val="FFFFFF"/>
                 </a:solidFill>
               </a14:hiddenFill>
             </a:ext>
             <a:ext uri="{91240B29-F687-4f45-9708-019B960494DF}">
-              <a14:hiddenLine xmlns:a14="http://schemas.microsoft.com/office/drawing/2010/main" xmlns="" w="9525">
+              <a14:hiddenLine xmlns="" xmlns:a14="http://schemas.microsoft.com/office/drawing/2010/main" w="9525">
                 <a:solidFill>
                   <a:srgbClr val="000000"/>
                 </a:solidFill>
@@ -31996,14 +31996,14 @@
           </a:ln>
           <a:extLst>
             <a:ext uri="{909E8E84-426E-40dd-AFC4-6F175D3DCCD1}">
-              <a14:hiddenFill xmlns:a14="http://schemas.microsoft.com/office/drawing/2010/main" xmlns="">
+              <a14:hiddenFill xmlns="" xmlns:a14="http://schemas.microsoft.com/office/drawing/2010/main">
                 <a:solidFill>
                   <a:srgbClr val="FFFFFF"/>
                 </a:solidFill>
               </a14:hiddenFill>
             </a:ext>
             <a:ext uri="{91240B29-F687-4f45-9708-019B960494DF}">
-              <a14:hiddenLine xmlns:a14="http://schemas.microsoft.com/office/drawing/2010/main" xmlns="" w="9525">
+              <a14:hiddenLine xmlns="" xmlns:a14="http://schemas.microsoft.com/office/drawing/2010/main" w="9525">
                 <a:solidFill>
                   <a:srgbClr val="000000"/>
                 </a:solidFill>
@@ -32168,14 +32168,14 @@
           </a:ln>
           <a:extLst>
             <a:ext uri="{909E8E84-426E-40dd-AFC4-6F175D3DCCD1}">
-              <a14:hiddenFill xmlns:a14="http://schemas.microsoft.com/office/drawing/2010/main" xmlns="">
+              <a14:hiddenFill xmlns="" xmlns:a14="http://schemas.microsoft.com/office/drawing/2010/main">
                 <a:solidFill>
                   <a:srgbClr val="FFFFFF"/>
                 </a:solidFill>
               </a14:hiddenFill>
             </a:ext>
             <a:ext uri="{91240B29-F687-4f45-9708-019B960494DF}">
-              <a14:hiddenLine xmlns:a14="http://schemas.microsoft.com/office/drawing/2010/main" xmlns="" w="9525">
+              <a14:hiddenLine xmlns="" xmlns:a14="http://schemas.microsoft.com/office/drawing/2010/main" w="9525">
                 <a:solidFill>
                   <a:srgbClr val="000000"/>
                 </a:solidFill>
@@ -33127,14 +33127,14 @@
           </a:ln>
           <a:extLst>
             <a:ext uri="{909E8E84-426E-40dd-AFC4-6F175D3DCCD1}">
-              <a14:hiddenFill xmlns:a14="http://schemas.microsoft.com/office/drawing/2010/main" xmlns="">
+              <a14:hiddenFill xmlns="" xmlns:a14="http://schemas.microsoft.com/office/drawing/2010/main">
                 <a:solidFill>
                   <a:srgbClr val="FFFFFF"/>
                 </a:solidFill>
               </a14:hiddenFill>
             </a:ext>
             <a:ext uri="{91240B29-F687-4f45-9708-019B960494DF}">
-              <a14:hiddenLine xmlns:a14="http://schemas.microsoft.com/office/drawing/2010/main" xmlns="" w="9525">
+              <a14:hiddenLine xmlns="" xmlns:a14="http://schemas.microsoft.com/office/drawing/2010/main" w="9525">
                 <a:solidFill>
                   <a:srgbClr val="000000"/>
                 </a:solidFill>
@@ -33189,14 +33189,14 @@
           </a:ln>
           <a:extLst>
             <a:ext uri="{909E8E84-426E-40dd-AFC4-6F175D3DCCD1}">
-              <a14:hiddenFill xmlns:a14="http://schemas.microsoft.com/office/drawing/2010/main" xmlns="">
+              <a14:hiddenFill xmlns="" xmlns:a14="http://schemas.microsoft.com/office/drawing/2010/main">
                 <a:solidFill>
                   <a:srgbClr val="FFFFFF"/>
                 </a:solidFill>
               </a14:hiddenFill>
             </a:ext>
             <a:ext uri="{91240B29-F687-4f45-9708-019B960494DF}">
-              <a14:hiddenLine xmlns:a14="http://schemas.microsoft.com/office/drawing/2010/main" xmlns="" w="9525">
+              <a14:hiddenLine xmlns="" xmlns:a14="http://schemas.microsoft.com/office/drawing/2010/main" w="9525">
                 <a:solidFill>
                   <a:srgbClr val="000000"/>
                 </a:solidFill>
@@ -33256,7 +33256,7 @@
           </a:ln>
           <a:extLst>
             <a:ext uri="{909E8E84-426E-40dd-AFC4-6F175D3DCCD1}">
-              <a14:hiddenFill xmlns:a14="http://schemas.microsoft.com/office/drawing/2010/main" xmlns="">
+              <a14:hiddenFill xmlns="" xmlns:a14="http://schemas.microsoft.com/office/drawing/2010/main">
                 <a:noFill/>
               </a14:hiddenFill>
             </a:ext>
@@ -33303,7 +33303,7 @@
           </a:ln>
           <a:extLst>
             <a:ext uri="{909E8E84-426E-40dd-AFC4-6F175D3DCCD1}">
-              <a14:hiddenFill xmlns:a14="http://schemas.microsoft.com/office/drawing/2010/main" xmlns="">
+              <a14:hiddenFill xmlns="" xmlns:a14="http://schemas.microsoft.com/office/drawing/2010/main">
                 <a:noFill/>
               </a14:hiddenFill>
             </a:ext>
@@ -33345,14 +33345,14 @@
           </a:ln>
           <a:extLst>
             <a:ext uri="{909E8E84-426E-40dd-AFC4-6F175D3DCCD1}">
-              <a14:hiddenFill xmlns:a14="http://schemas.microsoft.com/office/drawing/2010/main" xmlns="">
+              <a14:hiddenFill xmlns="" xmlns:a14="http://schemas.microsoft.com/office/drawing/2010/main">
                 <a:solidFill>
                   <a:srgbClr val="FFFFFF"/>
                 </a:solidFill>
               </a14:hiddenFill>
             </a:ext>
             <a:ext uri="{91240B29-F687-4f45-9708-019B960494DF}">
-              <a14:hiddenLine xmlns:a14="http://schemas.microsoft.com/office/drawing/2010/main" xmlns="" w="9525">
+              <a14:hiddenLine xmlns="" xmlns:a14="http://schemas.microsoft.com/office/drawing/2010/main" w="9525">
                 <a:solidFill>
                   <a:srgbClr val="000000"/>
                 </a:solidFill>
@@ -33407,14 +33407,14 @@
           </a:ln>
           <a:extLst>
             <a:ext uri="{909E8E84-426E-40dd-AFC4-6F175D3DCCD1}">
-              <a14:hiddenFill xmlns:a14="http://schemas.microsoft.com/office/drawing/2010/main" xmlns="">
+              <a14:hiddenFill xmlns="" xmlns:a14="http://schemas.microsoft.com/office/drawing/2010/main">
                 <a:solidFill>
                   <a:srgbClr val="FFFFFF"/>
                 </a:solidFill>
               </a14:hiddenFill>
             </a:ext>
             <a:ext uri="{91240B29-F687-4f45-9708-019B960494DF}">
-              <a14:hiddenLine xmlns:a14="http://schemas.microsoft.com/office/drawing/2010/main" xmlns="" w="9525">
+              <a14:hiddenLine xmlns="" xmlns:a14="http://schemas.microsoft.com/office/drawing/2010/main" w="9525">
                 <a:solidFill>
                   <a:srgbClr val="000000"/>
                 </a:solidFill>
@@ -33469,14 +33469,14 @@
           </a:ln>
           <a:extLst>
             <a:ext uri="{909E8E84-426E-40dd-AFC4-6F175D3DCCD1}">
-              <a14:hiddenFill xmlns:a14="http://schemas.microsoft.com/office/drawing/2010/main" xmlns="">
+              <a14:hiddenFill xmlns="" xmlns:a14="http://schemas.microsoft.com/office/drawing/2010/main">
                 <a:solidFill>
                   <a:srgbClr val="FFFFFF"/>
                 </a:solidFill>
               </a14:hiddenFill>
             </a:ext>
             <a:ext uri="{91240B29-F687-4f45-9708-019B960494DF}">
-              <a14:hiddenLine xmlns:a14="http://schemas.microsoft.com/office/drawing/2010/main" xmlns="" w="9525">
+              <a14:hiddenLine xmlns="" xmlns:a14="http://schemas.microsoft.com/office/drawing/2010/main" w="9525">
                 <a:solidFill>
                   <a:srgbClr val="000000"/>
                 </a:solidFill>
@@ -33642,14 +33642,14 @@
           </a:ln>
           <a:extLst>
             <a:ext uri="{909E8E84-426E-40dd-AFC4-6F175D3DCCD1}">
-              <a14:hiddenFill xmlns:a14="http://schemas.microsoft.com/office/drawing/2010/main" xmlns="">
+              <a14:hiddenFill xmlns="" xmlns:a14="http://schemas.microsoft.com/office/drawing/2010/main">
                 <a:solidFill>
                   <a:srgbClr val="FFFFFF"/>
                 </a:solidFill>
               </a14:hiddenFill>
             </a:ext>
             <a:ext uri="{91240B29-F687-4f45-9708-019B960494DF}">
-              <a14:hiddenLine xmlns:a14="http://schemas.microsoft.com/office/drawing/2010/main" xmlns="" w="9525">
+              <a14:hiddenLine xmlns="" xmlns:a14="http://schemas.microsoft.com/office/drawing/2010/main" w="9525">
                 <a:solidFill>
                   <a:srgbClr val="000000"/>
                 </a:solidFill>
@@ -33843,14 +33843,14 @@
           </a:ln>
           <a:extLst>
             <a:ext uri="{909E8E84-426E-40dd-AFC4-6F175D3DCCD1}">
-              <a14:hiddenFill xmlns:a14="http://schemas.microsoft.com/office/drawing/2010/main" xmlns="">
+              <a14:hiddenFill xmlns="" xmlns:a14="http://schemas.microsoft.com/office/drawing/2010/main">
                 <a:solidFill>
                   <a:srgbClr val="FFFFFF"/>
                 </a:solidFill>
               </a14:hiddenFill>
             </a:ext>
             <a:ext uri="{91240B29-F687-4f45-9708-019B960494DF}">
-              <a14:hiddenLine xmlns:a14="http://schemas.microsoft.com/office/drawing/2010/main" xmlns="" w="9525">
+              <a14:hiddenLine xmlns="" xmlns:a14="http://schemas.microsoft.com/office/drawing/2010/main" w="9525">
                 <a:solidFill>
                   <a:srgbClr val="000000"/>
                 </a:solidFill>
@@ -34562,14 +34562,14 @@
           </a:ln>
           <a:extLst>
             <a:ext uri="{909E8E84-426E-40dd-AFC4-6F175D3DCCD1}">
-              <a14:hiddenFill xmlns:a14="http://schemas.microsoft.com/office/drawing/2010/main" xmlns="">
+              <a14:hiddenFill xmlns="" xmlns:a14="http://schemas.microsoft.com/office/drawing/2010/main">
                 <a:solidFill>
                   <a:srgbClr val="FFFFFF"/>
                 </a:solidFill>
               </a14:hiddenFill>
             </a:ext>
             <a:ext uri="{91240B29-F687-4f45-9708-019B960494DF}">
-              <a14:hiddenLine xmlns:a14="http://schemas.microsoft.com/office/drawing/2010/main" xmlns="" w="9525">
+              <a14:hiddenLine xmlns="" xmlns:a14="http://schemas.microsoft.com/office/drawing/2010/main" w="9525">
                 <a:solidFill>
                   <a:srgbClr val="000000"/>
                 </a:solidFill>

--- a/PPTs/Lecture 15 - Network Security.pptx
+++ b/PPTs/Lecture 15 - Network Security.pptx
@@ -167,42 +167,128 @@
 </p:presentation>
 </file>
 
+<file path=ppt/revisionInfo.xml><?xml version="1.0" encoding="utf-8"?>
+<p1510:revInfo xmlns:a="http://schemas.openxmlformats.org/drawingml/2006/main" xmlns:r="http://schemas.openxmlformats.org/officeDocument/2006/relationships" xmlns:p1510="http://schemas.microsoft.com/office/powerpoint/2015/10/main">
+  <p1510:revLst>
+    <p1510:client id="{C23AB928-3A1C-4B78-AE48-2BBCD7925074}" v="2" dt="2026-04-30T19:50:35.138"/>
+  </p1510:revLst>
+</p1510:revInfo>
+</file>
+
 <file path=ppt/changesInfos/changesInfo1.xml><?xml version="1.0" encoding="utf-8"?>
 <pc:chgInfo xmlns:a="http://schemas.openxmlformats.org/drawingml/2006/main" xmlns:r="http://schemas.openxmlformats.org/officeDocument/2006/relationships" xmlns:ac="http://schemas.microsoft.com/office/drawing/2013/main/command" xmlns:pc="http://schemas.microsoft.com/office/powerpoint/2013/main/command">
   <pc:docChgLst>
     <pc:chgData name="Zonghua Gu" userId="9a7e1853e1951ef5" providerId="LiveId" clId="{CF1FAA12-072C-4ED5-BA76-0FFFAEFDB88A}"/>
-    <pc:docChg chg="modSld">
-      <pc:chgData name="Zonghua Gu" userId="9a7e1853e1951ef5" providerId="LiveId" clId="{CF1FAA12-072C-4ED5-BA76-0FFFAEFDB88A}" dt="2026-02-01T02:33:56.049" v="1" actId="1076"/>
+    <pc:docChg chg="custSel modSld">
+      <pc:chgData name="Zonghua Gu" userId="9a7e1853e1951ef5" providerId="LiveId" clId="{CF1FAA12-072C-4ED5-BA76-0FFFAEFDB88A}" dt="2026-04-30T19:53:31.734" v="110" actId="20577"/>
       <pc:docMkLst>
         <pc:docMk/>
       </pc:docMkLst>
-      <pc:sldChg chg="modSp mod">
-        <pc:chgData name="Zonghua Gu" userId="9a7e1853e1951ef5" providerId="LiveId" clId="{CF1FAA12-072C-4ED5-BA76-0FFFAEFDB88A}" dt="2026-02-01T02:33:56.049" v="1" actId="1076"/>
+      <pc:sldChg chg="delSp modSp mod">
+        <pc:chgData name="Zonghua Gu" userId="9a7e1853e1951ef5" providerId="LiveId" clId="{CF1FAA12-072C-4ED5-BA76-0FFFAEFDB88A}" dt="2026-04-30T19:53:31.734" v="110" actId="20577"/>
         <pc:sldMkLst>
           <pc:docMk/>
-          <pc:sldMk cId="521836014" sldId="385"/>
+          <pc:sldMk cId="0" sldId="372"/>
         </pc:sldMkLst>
         <pc:spChg chg="mod">
-          <ac:chgData name="Zonghua Gu" userId="9a7e1853e1951ef5" providerId="LiveId" clId="{CF1FAA12-072C-4ED5-BA76-0FFFAEFDB88A}" dt="2026-02-01T02:33:56.049" v="1" actId="1076"/>
+          <ac:chgData name="Zonghua Gu" userId="9a7e1853e1951ef5" providerId="LiveId" clId="{CF1FAA12-072C-4ED5-BA76-0FFFAEFDB88A}" dt="2026-04-30T19:53:31.734" v="110" actId="20577"/>
           <ac:spMkLst>
             <pc:docMk/>
-            <pc:sldMk cId="521836014" sldId="385"/>
-            <ac:spMk id="3" creationId="{0CD9B914-F45F-4811-AA7F-70B9B5CCBE89}"/>
+            <pc:sldMk cId="0" sldId="372"/>
+            <ac:spMk id="5" creationId="{D3D96742-7817-4EAC-B385-71DFCCCCAF0E}"/>
+          </ac:spMkLst>
+        </pc:spChg>
+        <pc:spChg chg="del">
+          <ac:chgData name="Zonghua Gu" userId="9a7e1853e1951ef5" providerId="LiveId" clId="{CF1FAA12-072C-4ED5-BA76-0FFFAEFDB88A}" dt="2026-04-30T19:52:10.909" v="16" actId="478"/>
+          <ac:spMkLst>
+            <pc:docMk/>
+            <pc:sldMk cId="0" sldId="372"/>
+            <ac:spMk id="6" creationId="{C3D722F6-A300-0477-39CC-3553CB979CF7}"/>
+          </ac:spMkLst>
+        </pc:spChg>
+        <pc:spChg chg="del">
+          <ac:chgData name="Zonghua Gu" userId="9a7e1853e1951ef5" providerId="LiveId" clId="{CF1FAA12-072C-4ED5-BA76-0FFFAEFDB88A}" dt="2026-04-30T19:52:06.623" v="15" actId="478"/>
+          <ac:spMkLst>
+            <pc:docMk/>
+            <pc:sldMk cId="0" sldId="372"/>
+            <ac:spMk id="7" creationId="{FE304F7A-9849-65B5-B158-93018AA10D7E}"/>
+          </ac:spMkLst>
+        </pc:spChg>
+        <pc:spChg chg="del">
+          <ac:chgData name="Zonghua Gu" userId="9a7e1853e1951ef5" providerId="LiveId" clId="{CF1FAA12-072C-4ED5-BA76-0FFFAEFDB88A}" dt="2026-04-30T19:52:06.623" v="15" actId="478"/>
+          <ac:spMkLst>
+            <pc:docMk/>
+            <pc:sldMk cId="0" sldId="372"/>
+            <ac:spMk id="8" creationId="{58DD8CD7-A846-8915-125E-A7021DB37239}"/>
+          </ac:spMkLst>
+        </pc:spChg>
+        <pc:picChg chg="del">
+          <ac:chgData name="Zonghua Gu" userId="9a7e1853e1951ef5" providerId="LiveId" clId="{CF1FAA12-072C-4ED5-BA76-0FFFAEFDB88A}" dt="2026-04-30T19:52:10.909" v="16" actId="478"/>
+          <ac:picMkLst>
+            <pc:docMk/>
+            <pc:sldMk cId="0" sldId="372"/>
+            <ac:picMk id="9" creationId="{70A09498-DFAE-A10D-4807-F9FC90B0963F}"/>
+          </ac:picMkLst>
+        </pc:picChg>
+        <pc:picChg chg="del">
+          <ac:chgData name="Zonghua Gu" userId="9a7e1853e1951ef5" providerId="LiveId" clId="{CF1FAA12-072C-4ED5-BA76-0FFFAEFDB88A}" dt="2026-04-30T19:52:10.909" v="16" actId="478"/>
+          <ac:picMkLst>
+            <pc:docMk/>
+            <pc:sldMk cId="0" sldId="372"/>
+            <ac:picMk id="10" creationId="{EC2A46FA-C16A-E4E6-E9E7-28A46D0DC9C4}"/>
+          </ac:picMkLst>
+        </pc:picChg>
+      </pc:sldChg>
+      <pc:sldChg chg="modSp mod">
+        <pc:chgData name="Zonghua Gu" userId="9a7e1853e1951ef5" providerId="LiveId" clId="{CF1FAA12-072C-4ED5-BA76-0FFFAEFDB88A}" dt="2026-04-30T19:38:15.837" v="5" actId="13822"/>
+        <pc:sldMkLst>
+          <pc:docMk/>
+          <pc:sldMk cId="2931325706" sldId="406"/>
+        </pc:sldMkLst>
+        <pc:cxnChg chg="mod">
+          <ac:chgData name="Zonghua Gu" userId="9a7e1853e1951ef5" providerId="LiveId" clId="{CF1FAA12-072C-4ED5-BA76-0FFFAEFDB88A}" dt="2026-04-30T19:38:15.837" v="5" actId="13822"/>
+          <ac:cxnSpMkLst>
+            <pc:docMk/>
+            <pc:sldMk cId="2931325706" sldId="406"/>
+            <ac:cxnSpMk id="8" creationId="{A6E9F404-FA3E-4C14-55DF-7A895B4938AF}"/>
+          </ac:cxnSpMkLst>
+        </pc:cxnChg>
+        <pc:cxnChg chg="mod">
+          <ac:chgData name="Zonghua Gu" userId="9a7e1853e1951ef5" providerId="LiveId" clId="{CF1FAA12-072C-4ED5-BA76-0FFFAEFDB88A}" dt="2026-04-30T19:38:15.837" v="5" actId="13822"/>
+          <ac:cxnSpMkLst>
+            <pc:docMk/>
+            <pc:sldMk cId="2931325706" sldId="406"/>
+            <ac:cxnSpMk id="9" creationId="{925DB043-F6AF-4CEF-CC56-55ECEB83CD79}"/>
+          </ac:cxnSpMkLst>
+        </pc:cxnChg>
+      </pc:sldChg>
+      <pc:sldChg chg="modSp mod">
+        <pc:chgData name="Zonghua Gu" userId="9a7e1853e1951ef5" providerId="LiveId" clId="{CF1FAA12-072C-4ED5-BA76-0FFFAEFDB88A}" dt="2026-04-30T19:34:24.306" v="2" actId="20577"/>
+        <pc:sldMkLst>
+          <pc:docMk/>
+          <pc:sldMk cId="1402479228" sldId="420"/>
+        </pc:sldMkLst>
+        <pc:spChg chg="mod">
+          <ac:chgData name="Zonghua Gu" userId="9a7e1853e1951ef5" providerId="LiveId" clId="{CF1FAA12-072C-4ED5-BA76-0FFFAEFDB88A}" dt="2026-04-30T19:34:24.306" v="2" actId="20577"/>
+          <ac:spMkLst>
+            <pc:docMk/>
+            <pc:sldMk cId="1402479228" sldId="420"/>
+            <ac:spMk id="6" creationId="{674A1DE5-A9AE-405F-ACAD-77D36C146AA2}"/>
           </ac:spMkLst>
         </pc:spChg>
       </pc:sldChg>
       <pc:sldChg chg="modSp mod">
-        <pc:chgData name="Zonghua Gu" userId="9a7e1853e1951ef5" providerId="LiveId" clId="{CF1FAA12-072C-4ED5-BA76-0FFFAEFDB88A}" dt="2026-02-01T02:33:52.846" v="0" actId="1076"/>
+        <pc:chgData name="Zonghua Gu" userId="9a7e1853e1951ef5" providerId="LiveId" clId="{CF1FAA12-072C-4ED5-BA76-0FFFAEFDB88A}" dt="2026-04-30T19:51:12.154" v="14" actId="20577"/>
         <pc:sldMkLst>
           <pc:docMk/>
-          <pc:sldMk cId="3485927457" sldId="450"/>
+          <pc:sldMk cId="2593956333" sldId="983"/>
         </pc:sldMkLst>
         <pc:spChg chg="mod">
-          <ac:chgData name="Zonghua Gu" userId="9a7e1853e1951ef5" providerId="LiveId" clId="{CF1FAA12-072C-4ED5-BA76-0FFFAEFDB88A}" dt="2026-02-01T02:33:52.846" v="0" actId="1076"/>
+          <ac:chgData name="Zonghua Gu" userId="9a7e1853e1951ef5" providerId="LiveId" clId="{CF1FAA12-072C-4ED5-BA76-0FFFAEFDB88A}" dt="2026-04-30T19:51:12.154" v="14" actId="20577"/>
           <ac:spMkLst>
             <pc:docMk/>
-            <pc:sldMk cId="3485927457" sldId="450"/>
-            <ac:spMk id="3" creationId="{201D4858-9FC2-488C-B884-BFFAA3F5FD19}"/>
+            <pc:sldMk cId="2593956333" sldId="983"/>
+            <ac:spMk id="5" creationId="{FE3D3D51-0AE5-7EF0-0670-A4F700604E93}"/>
           </ac:spMkLst>
         </pc:spChg>
       </pc:sldChg>
@@ -293,7 +379,7 @@
           <a:p>
             <a:fld id="{D153024D-5FCD-D142-BBE1-7B391F60AD88}" type="datetimeFigureOut">
               <a:rPr lang="en-US" smtClean="0"/>
-              <a:t>4/25/2026</a:t>
+              <a:t>4/30/2026</a:t>
             </a:fld>
             <a:endParaRPr lang="en-US" dirty="0"/>
           </a:p>
@@ -30089,14 +30175,14 @@
           </a:ln>
           <a:extLst>
             <a:ext uri="{909E8E84-426E-40dd-AFC4-6F175D3DCCD1}">
-              <a14:hiddenFill xmlns="" xmlns:a14="http://schemas.microsoft.com/office/drawing/2010/main">
+              <a14:hiddenFill xmlns:a14="http://schemas.microsoft.com/office/drawing/2010/main" xmlns="">
                 <a:solidFill>
                   <a:srgbClr val="FFFFFF"/>
                 </a:solidFill>
               </a14:hiddenFill>
             </a:ext>
             <a:ext uri="{91240B29-F687-4f45-9708-019B960494DF}">
-              <a14:hiddenLine xmlns="" xmlns:a14="http://schemas.microsoft.com/office/drawing/2010/main" w="9525">
+              <a14:hiddenLine xmlns:a14="http://schemas.microsoft.com/office/drawing/2010/main" xmlns="" w="9525">
                 <a:solidFill>
                   <a:srgbClr val="000000"/>
                 </a:solidFill>
@@ -30149,14 +30235,14 @@
           </a:ln>
           <a:extLst>
             <a:ext uri="{909E8E84-426E-40dd-AFC4-6F175D3DCCD1}">
-              <a14:hiddenFill xmlns="" xmlns:a14="http://schemas.microsoft.com/office/drawing/2010/main">
+              <a14:hiddenFill xmlns:a14="http://schemas.microsoft.com/office/drawing/2010/main" xmlns="">
                 <a:solidFill>
                   <a:srgbClr val="FFFFFF"/>
                 </a:solidFill>
               </a14:hiddenFill>
             </a:ext>
             <a:ext uri="{91240B29-F687-4f45-9708-019B960494DF}">
-              <a14:hiddenLine xmlns="" xmlns:a14="http://schemas.microsoft.com/office/drawing/2010/main" w="9525">
+              <a14:hiddenLine xmlns:a14="http://schemas.microsoft.com/office/drawing/2010/main" xmlns="" w="9525">
                 <a:solidFill>
                   <a:srgbClr val="000000"/>
                 </a:solidFill>
@@ -30285,14 +30371,14 @@
           </a:ln>
           <a:extLst>
             <a:ext uri="{909E8E84-426E-40dd-AFC4-6F175D3DCCD1}">
-              <a14:hiddenFill xmlns="" xmlns:a14="http://schemas.microsoft.com/office/drawing/2010/main">
+              <a14:hiddenFill xmlns:a14="http://schemas.microsoft.com/office/drawing/2010/main" xmlns="">
                 <a:solidFill>
                   <a:srgbClr val="FFFFFF"/>
                 </a:solidFill>
               </a14:hiddenFill>
             </a:ext>
             <a:ext uri="{91240B29-F687-4f45-9708-019B960494DF}">
-              <a14:hiddenLine xmlns="" xmlns:a14="http://schemas.microsoft.com/office/drawing/2010/main" w="9525">
+              <a14:hiddenLine xmlns:a14="http://schemas.microsoft.com/office/drawing/2010/main" xmlns="" w="9525">
                 <a:solidFill>
                   <a:srgbClr val="000000"/>
                 </a:solidFill>
@@ -30540,14 +30626,14 @@
             </a:ln>
             <a:extLst>
               <a:ext uri="{909E8E84-426E-40dd-AFC4-6F175D3DCCD1}">
-                <a14:hiddenFill xmlns="" xmlns:a14="http://schemas.microsoft.com/office/drawing/2010/main">
+                <a14:hiddenFill xmlns:a14="http://schemas.microsoft.com/office/drawing/2010/main" xmlns="">
                   <a:solidFill>
                     <a:srgbClr val="FFFFFF"/>
                   </a:solidFill>
                 </a14:hiddenFill>
               </a:ext>
               <a:ext uri="{91240B29-F687-4f45-9708-019B960494DF}">
-                <a14:hiddenLine xmlns="" xmlns:a14="http://schemas.microsoft.com/office/drawing/2010/main" w="9525">
+                <a14:hiddenLine xmlns:a14="http://schemas.microsoft.com/office/drawing/2010/main" xmlns="" w="9525">
                   <a:solidFill>
                     <a:srgbClr val="000000"/>
                   </a:solidFill>
@@ -30725,14 +30811,14 @@
           </a:ln>
           <a:extLst>
             <a:ext uri="{909E8E84-426E-40dd-AFC4-6F175D3DCCD1}">
-              <a14:hiddenFill xmlns="" xmlns:a14="http://schemas.microsoft.com/office/drawing/2010/main">
+              <a14:hiddenFill xmlns:a14="http://schemas.microsoft.com/office/drawing/2010/main" xmlns="">
                 <a:solidFill>
                   <a:srgbClr val="FFFFFF"/>
                 </a:solidFill>
               </a14:hiddenFill>
             </a:ext>
             <a:ext uri="{91240B29-F687-4f45-9708-019B960494DF}">
-              <a14:hiddenLine xmlns="" xmlns:a14="http://schemas.microsoft.com/office/drawing/2010/main" w="9525">
+              <a14:hiddenLine xmlns:a14="http://schemas.microsoft.com/office/drawing/2010/main" xmlns="" w="9525">
                 <a:solidFill>
                   <a:srgbClr val="000000"/>
                 </a:solidFill>
@@ -30899,7 +30985,7 @@
           </a:ln>
           <a:extLst>
             <a:ext uri="{909E8E84-426E-40dd-AFC4-6F175D3DCCD1}">
-              <a14:hiddenFill xmlns="" xmlns:a14="http://schemas.microsoft.com/office/drawing/2010/main">
+              <a14:hiddenFill xmlns:a14="http://schemas.microsoft.com/office/drawing/2010/main" xmlns="">
                 <a:noFill/>
               </a14:hiddenFill>
             </a:ext>
@@ -30946,7 +31032,7 @@
           </a:ln>
           <a:extLst>
             <a:ext uri="{909E8E84-426E-40dd-AFC4-6F175D3DCCD1}">
-              <a14:hiddenFill xmlns="" xmlns:a14="http://schemas.microsoft.com/office/drawing/2010/main">
+              <a14:hiddenFill xmlns:a14="http://schemas.microsoft.com/office/drawing/2010/main" xmlns="">
                 <a:noFill/>
               </a14:hiddenFill>
             </a:ext>
@@ -30988,14 +31074,14 @@
           </a:ln>
           <a:extLst>
             <a:ext uri="{909E8E84-426E-40dd-AFC4-6F175D3DCCD1}">
-              <a14:hiddenFill xmlns="" xmlns:a14="http://schemas.microsoft.com/office/drawing/2010/main">
+              <a14:hiddenFill xmlns:a14="http://schemas.microsoft.com/office/drawing/2010/main" xmlns="">
                 <a:solidFill>
                   <a:srgbClr val="FFFFFF"/>
                 </a:solidFill>
               </a14:hiddenFill>
             </a:ext>
             <a:ext uri="{91240B29-F687-4f45-9708-019B960494DF}">
-              <a14:hiddenLine xmlns="" xmlns:a14="http://schemas.microsoft.com/office/drawing/2010/main" w="9525">
+              <a14:hiddenLine xmlns:a14="http://schemas.microsoft.com/office/drawing/2010/main" xmlns="" w="9525">
                 <a:solidFill>
                   <a:srgbClr val="000000"/>
                 </a:solidFill>
@@ -31162,7 +31248,7 @@
           </a:ln>
           <a:extLst>
             <a:ext uri="{909E8E84-426E-40dd-AFC4-6F175D3DCCD1}">
-              <a14:hiddenFill xmlns="" xmlns:a14="http://schemas.microsoft.com/office/drawing/2010/main">
+              <a14:hiddenFill xmlns:a14="http://schemas.microsoft.com/office/drawing/2010/main" xmlns="">
                 <a:noFill/>
               </a14:hiddenFill>
             </a:ext>
@@ -31254,7 +31340,7 @@
           </a:ln>
           <a:extLst>
             <a:ext uri="{909E8E84-426E-40dd-AFC4-6F175D3DCCD1}">
-              <a14:hiddenFill xmlns="" xmlns:a14="http://schemas.microsoft.com/office/drawing/2010/main">
+              <a14:hiddenFill xmlns:a14="http://schemas.microsoft.com/office/drawing/2010/main" xmlns="">
                 <a:solidFill>
                   <a:srgbClr val="FFFFFF"/>
                 </a:solidFill>
@@ -31348,7 +31434,7 @@
           </a:ln>
           <a:extLst>
             <a:ext uri="{909E8E84-426E-40dd-AFC4-6F175D3DCCD1}">
-              <a14:hiddenFill xmlns="" xmlns:a14="http://schemas.microsoft.com/office/drawing/2010/main">
+              <a14:hiddenFill xmlns:a14="http://schemas.microsoft.com/office/drawing/2010/main" xmlns="">
                 <a:solidFill>
                   <a:srgbClr val="FFFFFF"/>
                 </a:solidFill>
@@ -31397,7 +31483,7 @@
           </a:ln>
           <a:extLst>
             <a:ext uri="{909E8E84-426E-40dd-AFC4-6F175D3DCCD1}">
-              <a14:hiddenFill xmlns="" xmlns:a14="http://schemas.microsoft.com/office/drawing/2010/main">
+              <a14:hiddenFill xmlns:a14="http://schemas.microsoft.com/office/drawing/2010/main" xmlns="">
                 <a:noFill/>
               </a14:hiddenFill>
             </a:ext>
@@ -31439,14 +31525,14 @@
           </a:ln>
           <a:extLst>
             <a:ext uri="{909E8E84-426E-40dd-AFC4-6F175D3DCCD1}">
-              <a14:hiddenFill xmlns="" xmlns:a14="http://schemas.microsoft.com/office/drawing/2010/main">
+              <a14:hiddenFill xmlns:a14="http://schemas.microsoft.com/office/drawing/2010/main" xmlns="">
                 <a:solidFill>
                   <a:srgbClr val="FFFFFF"/>
                 </a:solidFill>
               </a14:hiddenFill>
             </a:ext>
             <a:ext uri="{91240B29-F687-4f45-9708-019B960494DF}">
-              <a14:hiddenLine xmlns="" xmlns:a14="http://schemas.microsoft.com/office/drawing/2010/main" w="9525">
+              <a14:hiddenLine xmlns:a14="http://schemas.microsoft.com/office/drawing/2010/main" xmlns="" w="9525">
                 <a:solidFill>
                   <a:srgbClr val="000000"/>
                 </a:solidFill>
@@ -31613,7 +31699,7 @@
           </a:ln>
           <a:extLst>
             <a:ext uri="{909E8E84-426E-40dd-AFC4-6F175D3DCCD1}">
-              <a14:hiddenFill xmlns="" xmlns:a14="http://schemas.microsoft.com/office/drawing/2010/main">
+              <a14:hiddenFill xmlns:a14="http://schemas.microsoft.com/office/drawing/2010/main" xmlns="">
                 <a:noFill/>
               </a14:hiddenFill>
             </a:ext>
@@ -31655,14 +31741,14 @@
           </a:ln>
           <a:extLst>
             <a:ext uri="{909E8E84-426E-40dd-AFC4-6F175D3DCCD1}">
-              <a14:hiddenFill xmlns="" xmlns:a14="http://schemas.microsoft.com/office/drawing/2010/main">
+              <a14:hiddenFill xmlns:a14="http://schemas.microsoft.com/office/drawing/2010/main" xmlns="">
                 <a:solidFill>
                   <a:srgbClr val="FFFFFF"/>
                 </a:solidFill>
               </a14:hiddenFill>
             </a:ext>
             <a:ext uri="{91240B29-F687-4f45-9708-019B960494DF}">
-              <a14:hiddenLine xmlns="" xmlns:a14="http://schemas.microsoft.com/office/drawing/2010/main" w="9525">
+              <a14:hiddenLine xmlns:a14="http://schemas.microsoft.com/office/drawing/2010/main" xmlns="" w="9525">
                 <a:solidFill>
                   <a:srgbClr val="000000"/>
                 </a:solidFill>
@@ -31824,14 +31910,14 @@
           </a:ln>
           <a:extLst>
             <a:ext uri="{909E8E84-426E-40dd-AFC4-6F175D3DCCD1}">
-              <a14:hiddenFill xmlns="" xmlns:a14="http://schemas.microsoft.com/office/drawing/2010/main">
+              <a14:hiddenFill xmlns:a14="http://schemas.microsoft.com/office/drawing/2010/main" xmlns="">
                 <a:solidFill>
                   <a:srgbClr val="FFFFFF"/>
                 </a:solidFill>
               </a14:hiddenFill>
             </a:ext>
             <a:ext uri="{91240B29-F687-4f45-9708-019B960494DF}">
-              <a14:hiddenLine xmlns="" xmlns:a14="http://schemas.microsoft.com/office/drawing/2010/main" w="9525">
+              <a14:hiddenLine xmlns:a14="http://schemas.microsoft.com/office/drawing/2010/main" xmlns="" w="9525">
                 <a:solidFill>
                   <a:srgbClr val="000000"/>
                 </a:solidFill>
@@ -31996,14 +32082,14 @@
           </a:ln>
           <a:extLst>
             <a:ext uri="{909E8E84-426E-40dd-AFC4-6F175D3DCCD1}">
-              <a14:hiddenFill xmlns="" xmlns:a14="http://schemas.microsoft.com/office/drawing/2010/main">
+              <a14:hiddenFill xmlns:a14="http://schemas.microsoft.com/office/drawing/2010/main" xmlns="">
                 <a:solidFill>
                   <a:srgbClr val="FFFFFF"/>
                 </a:solidFill>
               </a14:hiddenFill>
             </a:ext>
             <a:ext uri="{91240B29-F687-4f45-9708-019B960494DF}">
-              <a14:hiddenLine xmlns="" xmlns:a14="http://schemas.microsoft.com/office/drawing/2010/main" w="9525">
+              <a14:hiddenLine xmlns:a14="http://schemas.microsoft.com/office/drawing/2010/main" xmlns="" w="9525">
                 <a:solidFill>
                   <a:srgbClr val="000000"/>
                 </a:solidFill>
@@ -32168,14 +32254,14 @@
           </a:ln>
           <a:extLst>
             <a:ext uri="{909E8E84-426E-40dd-AFC4-6F175D3DCCD1}">
-              <a14:hiddenFill xmlns="" xmlns:a14="http://schemas.microsoft.com/office/drawing/2010/main">
+              <a14:hiddenFill xmlns:a14="http://schemas.microsoft.com/office/drawing/2010/main" xmlns="">
                 <a:solidFill>
                   <a:srgbClr val="FFFFFF"/>
                 </a:solidFill>
               </a14:hiddenFill>
             </a:ext>
             <a:ext uri="{91240B29-F687-4f45-9708-019B960494DF}">
-              <a14:hiddenLine xmlns="" xmlns:a14="http://schemas.microsoft.com/office/drawing/2010/main" w="9525">
+              <a14:hiddenLine xmlns:a14="http://schemas.microsoft.com/office/drawing/2010/main" xmlns="" w="9525">
                 <a:solidFill>
                   <a:srgbClr val="000000"/>
                 </a:solidFill>
@@ -33127,14 +33213,14 @@
           </a:ln>
           <a:extLst>
             <a:ext uri="{909E8E84-426E-40dd-AFC4-6F175D3DCCD1}">
-              <a14:hiddenFill xmlns="" xmlns:a14="http://schemas.microsoft.com/office/drawing/2010/main">
+              <a14:hiddenFill xmlns:a14="http://schemas.microsoft.com/office/drawing/2010/main" xmlns="">
                 <a:solidFill>
                   <a:srgbClr val="FFFFFF"/>
                 </a:solidFill>
               </a14:hiddenFill>
             </a:ext>
             <a:ext uri="{91240B29-F687-4f45-9708-019B960494DF}">
-              <a14:hiddenLine xmlns="" xmlns:a14="http://schemas.microsoft.com/office/drawing/2010/main" w="9525">
+              <a14:hiddenLine xmlns:a14="http://schemas.microsoft.com/office/drawing/2010/main" xmlns="" w="9525">
                 <a:solidFill>
                   <a:srgbClr val="000000"/>
                 </a:solidFill>
@@ -33189,14 +33275,14 @@
           </a:ln>
           <a:extLst>
             <a:ext uri="{909E8E84-426E-40dd-AFC4-6F175D3DCCD1}">
-              <a14:hiddenFill xmlns="" xmlns:a14="http://schemas.microsoft.com/office/drawing/2010/main">
+              <a14:hiddenFill xmlns:a14="http://schemas.microsoft.com/office/drawing/2010/main" xmlns="">
                 <a:solidFill>
                   <a:srgbClr val="FFFFFF"/>
                 </a:solidFill>
               </a14:hiddenFill>
             </a:ext>
             <a:ext uri="{91240B29-F687-4f45-9708-019B960494DF}">
-              <a14:hiddenLine xmlns="" xmlns:a14="http://schemas.microsoft.com/office/drawing/2010/main" w="9525">
+              <a14:hiddenLine xmlns:a14="http://schemas.microsoft.com/office/drawing/2010/main" xmlns="" w="9525">
                 <a:solidFill>
                   <a:srgbClr val="000000"/>
                 </a:solidFill>
@@ -33256,7 +33342,7 @@
           </a:ln>
           <a:extLst>
             <a:ext uri="{909E8E84-426E-40dd-AFC4-6F175D3DCCD1}">
-              <a14:hiddenFill xmlns="" xmlns:a14="http://schemas.microsoft.com/office/drawing/2010/main">
+              <a14:hiddenFill xmlns:a14="http://schemas.microsoft.com/office/drawing/2010/main" xmlns="">
                 <a:noFill/>
               </a14:hiddenFill>
             </a:ext>
@@ -33303,7 +33389,7 @@
           </a:ln>
           <a:extLst>
             <a:ext uri="{909E8E84-426E-40dd-AFC4-6F175D3DCCD1}">
-              <a14:hiddenFill xmlns="" xmlns:a14="http://schemas.microsoft.com/office/drawing/2010/main">
+              <a14:hiddenFill xmlns:a14="http://schemas.microsoft.com/office/drawing/2010/main" xmlns="">
                 <a:noFill/>
               </a14:hiddenFill>
             </a:ext>
@@ -33345,14 +33431,14 @@
           </a:ln>
           <a:extLst>
             <a:ext uri="{909E8E84-426E-40dd-AFC4-6F175D3DCCD1}">
-              <a14:hiddenFill xmlns="" xmlns:a14="http://schemas.microsoft.com/office/drawing/2010/main">
+              <a14:hiddenFill xmlns:a14="http://schemas.microsoft.com/office/drawing/2010/main" xmlns="">
                 <a:solidFill>
                   <a:srgbClr val="FFFFFF"/>
                 </a:solidFill>
               </a14:hiddenFill>
             </a:ext>
             <a:ext uri="{91240B29-F687-4f45-9708-019B960494DF}">
-              <a14:hiddenLine xmlns="" xmlns:a14="http://schemas.microsoft.com/office/drawing/2010/main" w="9525">
+              <a14:hiddenLine xmlns:a14="http://schemas.microsoft.com/office/drawing/2010/main" xmlns="" w="9525">
                 <a:solidFill>
                   <a:srgbClr val="000000"/>
                 </a:solidFill>
@@ -33407,14 +33493,14 @@
           </a:ln>
           <a:extLst>
             <a:ext uri="{909E8E84-426E-40dd-AFC4-6F175D3DCCD1}">
-              <a14:hiddenFill xmlns="" xmlns:a14="http://schemas.microsoft.com/office/drawing/2010/main">
+              <a14:hiddenFill xmlns:a14="http://schemas.microsoft.com/office/drawing/2010/main" xmlns="">
                 <a:solidFill>
                   <a:srgbClr val="FFFFFF"/>
                 </a:solidFill>
               </a14:hiddenFill>
             </a:ext>
             <a:ext uri="{91240B29-F687-4f45-9708-019B960494DF}">
-              <a14:hiddenLine xmlns="" xmlns:a14="http://schemas.microsoft.com/office/drawing/2010/main" w="9525">
+              <a14:hiddenLine xmlns:a14="http://schemas.microsoft.com/office/drawing/2010/main" xmlns="" w="9525">
                 <a:solidFill>
                   <a:srgbClr val="000000"/>
                 </a:solidFill>
@@ -33469,14 +33555,14 @@
           </a:ln>
           <a:extLst>
             <a:ext uri="{909E8E84-426E-40dd-AFC4-6F175D3DCCD1}">
-              <a14:hiddenFill xmlns="" xmlns:a14="http://schemas.microsoft.com/office/drawing/2010/main">
+              <a14:hiddenFill xmlns:a14="http://schemas.microsoft.com/office/drawing/2010/main" xmlns="">
                 <a:solidFill>
                   <a:srgbClr val="FFFFFF"/>
                 </a:solidFill>
               </a14:hiddenFill>
             </a:ext>
             <a:ext uri="{91240B29-F687-4f45-9708-019B960494DF}">
-              <a14:hiddenLine xmlns="" xmlns:a14="http://schemas.microsoft.com/office/drawing/2010/main" w="9525">
+              <a14:hiddenLine xmlns:a14="http://schemas.microsoft.com/office/drawing/2010/main" xmlns="" w="9525">
                 <a:solidFill>
                   <a:srgbClr val="000000"/>
                 </a:solidFill>
@@ -33642,14 +33728,14 @@
           </a:ln>
           <a:extLst>
             <a:ext uri="{909E8E84-426E-40dd-AFC4-6F175D3DCCD1}">
-              <a14:hiddenFill xmlns="" xmlns:a14="http://schemas.microsoft.com/office/drawing/2010/main">
+              <a14:hiddenFill xmlns:a14="http://schemas.microsoft.com/office/drawing/2010/main" xmlns="">
                 <a:solidFill>
                   <a:srgbClr val="FFFFFF"/>
                 </a:solidFill>
               </a14:hiddenFill>
             </a:ext>
             <a:ext uri="{91240B29-F687-4f45-9708-019B960494DF}">
-              <a14:hiddenLine xmlns="" xmlns:a14="http://schemas.microsoft.com/office/drawing/2010/main" w="9525">
+              <a14:hiddenLine xmlns:a14="http://schemas.microsoft.com/office/drawing/2010/main" xmlns="" w="9525">
                 <a:solidFill>
                   <a:srgbClr val="000000"/>
                 </a:solidFill>
@@ -33843,14 +33929,14 @@
           </a:ln>
           <a:extLst>
             <a:ext uri="{909E8E84-426E-40dd-AFC4-6F175D3DCCD1}">
-              <a14:hiddenFill xmlns="" xmlns:a14="http://schemas.microsoft.com/office/drawing/2010/main">
+              <a14:hiddenFill xmlns:a14="http://schemas.microsoft.com/office/drawing/2010/main" xmlns="">
                 <a:solidFill>
                   <a:srgbClr val="FFFFFF"/>
                 </a:solidFill>
               </a14:hiddenFill>
             </a:ext>
             <a:ext uri="{91240B29-F687-4f45-9708-019B960494DF}">
-              <a14:hiddenLine xmlns="" xmlns:a14="http://schemas.microsoft.com/office/drawing/2010/main" w="9525">
+              <a14:hiddenLine xmlns:a14="http://schemas.microsoft.com/office/drawing/2010/main" xmlns="" w="9525">
                 <a:solidFill>
                   <a:srgbClr val="000000"/>
                 </a:solidFill>
@@ -34562,14 +34648,14 @@
           </a:ln>
           <a:extLst>
             <a:ext uri="{909E8E84-426E-40dd-AFC4-6F175D3DCCD1}">
-              <a14:hiddenFill xmlns="" xmlns:a14="http://schemas.microsoft.com/office/drawing/2010/main">
+              <a14:hiddenFill xmlns:a14="http://schemas.microsoft.com/office/drawing/2010/main" xmlns="">
                 <a:solidFill>
                   <a:srgbClr val="FFFFFF"/>
                 </a:solidFill>
               </a14:hiddenFill>
             </a:ext>
             <a:ext uri="{91240B29-F687-4f45-9708-019B960494DF}">
-              <a14:hiddenLine xmlns="" xmlns:a14="http://schemas.microsoft.com/office/drawing/2010/main" w="9525">
+              <a14:hiddenLine xmlns:a14="http://schemas.microsoft.com/office/drawing/2010/main" xmlns="" w="9525">
                 <a:solidFill>
                   <a:srgbClr val="000000"/>
                 </a:solidFill>
@@ -35223,8 +35309,8 @@
           </a:prstGeom>
         </p:spPr>
       </p:pic>
-      <mc:AlternateContent xmlns:mc="http://schemas.openxmlformats.org/markup-compatibility/2006" xmlns:a14="http://schemas.microsoft.com/office/drawing/2010/main">
-        <mc:Choice Requires="a14">
+      <mc:AlternateContent xmlns:mc="http://schemas.openxmlformats.org/markup-compatibility/2006">
+        <mc:Choice xmlns:a14="http://schemas.microsoft.com/office/drawing/2010/main" Requires="a14">
           <p:sp>
             <p:nvSpPr>
               <p:cNvPr id="6" name="Content Placeholder 2">
@@ -35258,7 +35344,7 @@
                     <a:latin typeface="Times New Roman" panose="02020603050405020304" pitchFamily="18" charset="0"/>
                     <a:cs typeface="Times New Roman" panose="02020603050405020304" pitchFamily="18" charset="0"/>
                   </a:rPr>
-                  <a:t>A stream cypher that stream cipher that operates one bit at a time:</a:t>
+                  <a:t>A stream cypher that operates one bit at a time:</a:t>
                 </a:r>
               </a:p>
               <a:p>
@@ -35664,7 +35750,7 @@
             </p:txBody>
           </p:sp>
         </mc:Choice>
-        <mc:Fallback xmlns="">
+        <mc:Fallback>
           <p:sp>
             <p:nvSpPr>
               <p:cNvPr id="6" name="Content Placeholder 2">
@@ -35698,7 +35784,7 @@
               <a:lstStyle/>
               <a:p>
                 <a:r>
-                  <a:rPr lang="en-SE">
+                  <a:rPr lang="en-US">
                     <a:noFill/>
                   </a:rPr>
                   <a:t> </a:t>
@@ -38070,7 +38156,7 @@
         </p:nvCxnSpPr>
         <p:spPr>
           <a:xfrm flipV="1">
-            <a:off x="7897091" y="1500272"/>
+            <a:off x="7097669" y="2930792"/>
             <a:ext cx="618230" cy="835752"/>
           </a:xfrm>
           <a:prstGeom prst="straightConnector1">
@@ -38081,14 +38167,14 @@
           </a:ln>
         </p:spPr>
         <p:style>
-          <a:lnRef idx="1">
-            <a:schemeClr val="accent1"/>
+          <a:lnRef idx="3">
+            <a:schemeClr val="accent2"/>
           </a:lnRef>
           <a:fillRef idx="0">
-            <a:schemeClr val="accent1"/>
+            <a:schemeClr val="accent2"/>
           </a:fillRef>
-          <a:effectRef idx="0">
-            <a:schemeClr val="accent1"/>
+          <a:effectRef idx="2">
+            <a:schemeClr val="accent2"/>
           </a:effectRef>
           <a:fontRef idx="minor">
             <a:schemeClr val="tx1"/>
@@ -38111,7 +38197,7 @@
         </p:nvCxnSpPr>
         <p:spPr>
           <a:xfrm>
-            <a:off x="7897091" y="2504465"/>
+            <a:off x="7097669" y="3934985"/>
             <a:ext cx="900495" cy="1329708"/>
           </a:xfrm>
           <a:prstGeom prst="straightConnector1">
@@ -38122,14 +38208,14 @@
           </a:ln>
         </p:spPr>
         <p:style>
-          <a:lnRef idx="1">
-            <a:schemeClr val="accent1"/>
+          <a:lnRef idx="3">
+            <a:schemeClr val="accent2"/>
           </a:lnRef>
           <a:fillRef idx="0">
-            <a:schemeClr val="accent1"/>
+            <a:schemeClr val="accent2"/>
           </a:fillRef>
-          <a:effectRef idx="0">
-            <a:schemeClr val="accent1"/>
+          <a:effectRef idx="2">
+            <a:schemeClr val="accent2"/>
           </a:effectRef>
           <a:fontRef idx="minor">
             <a:schemeClr val="tx1"/>
@@ -45364,8 +45450,24 @@
             <a:pPr lvl="1"/>
             <a:r>
               <a:rPr lang="en-US" dirty="0"/>
+              <a:t>Does not protect confidentiality, since anyone can decrypt the ciphertext, but protects integrity </a:t>
+            </a:r>
+            <a:r>
+              <a:rPr lang="en-US"/>
+              <a:t>and non-repudiation</a:t>
+            </a:r>
+            <a:endParaRPr lang="en-US" dirty="0"/>
+          </a:p>
+          <a:p>
+            <a:pPr lvl="1"/>
+            <a:r>
+              <a:rPr lang="en-US" dirty="0"/>
               <a:t>There are more efficient methods based on MAC or crypto hash function (discussed later).</a:t>
             </a:r>
+          </a:p>
+          <a:p>
+            <a:pPr lvl="1"/>
+            <a:endParaRPr lang="en-US" dirty="0"/>
           </a:p>
           <a:p>
             <a:endParaRPr lang="en-SE" dirty="0"/>
@@ -45576,297 +45678,6 @@
           <a:xfrm>
             <a:off x="5019052" y="1187216"/>
             <a:ext cx="6733547" cy="4253443"/>
-          </a:xfrm>
-          <a:prstGeom prst="rect">
-            <a:avLst/>
-          </a:prstGeom>
-        </p:spPr>
-      </p:pic>
-      <p:sp>
-        <p:nvSpPr>
-          <p:cNvPr id="6" name="object 13">
-            <a:extLst>
-              <a:ext uri="{FF2B5EF4-FFF2-40B4-BE49-F238E27FC236}">
-                <a16:creationId xmlns:a16="http://schemas.microsoft.com/office/drawing/2014/main" id="{C3D722F6-A300-0477-39CC-3553CB979CF7}"/>
-              </a:ext>
-            </a:extLst>
-          </p:cNvPr>
-          <p:cNvSpPr txBox="1"/>
-          <p:nvPr/>
-        </p:nvSpPr>
-        <p:spPr>
-          <a:xfrm>
-            <a:off x="9711346" y="5814697"/>
-            <a:ext cx="2032635" cy="660400"/>
-          </a:xfrm>
-          <a:prstGeom prst="rect">
-            <a:avLst/>
-          </a:prstGeom>
-          <a:ln w="25400">
-            <a:solidFill>
-              <a:srgbClr val="000000"/>
-            </a:solidFill>
-          </a:ln>
-        </p:spPr>
-        <p:txBody>
-          <a:bodyPr vert="horz" wrap="square" lIns="0" tIns="104139" rIns="0" bIns="0" rtlCol="0">
-            <a:spAutoFit/>
-          </a:bodyPr>
-          <a:lstStyle/>
-          <a:p>
-            <a:pPr marL="393065">
-              <a:lnSpc>
-                <a:spcPct val="100000"/>
-              </a:lnSpc>
-              <a:spcBef>
-                <a:spcPts val="819"/>
-              </a:spcBef>
-            </a:pPr>
-            <a:r>
-              <a:rPr sz="2800" spc="-10" dirty="0">
-                <a:latin typeface="Times New Roman"/>
-                <a:cs typeface="Times New Roman"/>
-              </a:rPr>
-              <a:t>Message</a:t>
-            </a:r>
-            <a:endParaRPr sz="2800">
-              <a:latin typeface="Times New Roman"/>
-              <a:cs typeface="Times New Roman"/>
-            </a:endParaRPr>
-          </a:p>
-        </p:txBody>
-      </p:sp>
-      <p:sp>
-        <p:nvSpPr>
-          <p:cNvPr id="7" name="object 14">
-            <a:extLst>
-              <a:ext uri="{FF2B5EF4-FFF2-40B4-BE49-F238E27FC236}">
-                <a16:creationId xmlns:a16="http://schemas.microsoft.com/office/drawing/2014/main" id="{FE304F7A-9849-65B5-B158-93018AA10D7E}"/>
-              </a:ext>
-            </a:extLst>
-          </p:cNvPr>
-          <p:cNvSpPr txBox="1"/>
-          <p:nvPr/>
-        </p:nvSpPr>
-        <p:spPr>
-          <a:xfrm>
-            <a:off x="7653946" y="5662297"/>
-            <a:ext cx="4318635" cy="965200"/>
-          </a:xfrm>
-          <a:prstGeom prst="rect">
-            <a:avLst/>
-          </a:prstGeom>
-          <a:ln w="25400">
-            <a:solidFill>
-              <a:srgbClr val="000000"/>
-            </a:solidFill>
-          </a:ln>
-        </p:spPr>
-        <p:txBody>
-          <a:bodyPr vert="horz" wrap="square" lIns="0" tIns="0" rIns="0" bIns="0" rtlCol="0">
-            <a:spAutoFit/>
-          </a:bodyPr>
-          <a:lstStyle/>
-          <a:p>
-            <a:pPr>
-              <a:lnSpc>
-                <a:spcPct val="100000"/>
-              </a:lnSpc>
-            </a:pPr>
-            <a:endParaRPr sz="2000" dirty="0">
-              <a:latin typeface="Times New Roman"/>
-              <a:cs typeface="Times New Roman"/>
-            </a:endParaRPr>
-          </a:p>
-          <a:p>
-            <a:pPr>
-              <a:lnSpc>
-                <a:spcPct val="100000"/>
-              </a:lnSpc>
-              <a:spcBef>
-                <a:spcPts val="150"/>
-              </a:spcBef>
-            </a:pPr>
-            <a:endParaRPr sz="2000" dirty="0">
-              <a:latin typeface="Times New Roman"/>
-              <a:cs typeface="Times New Roman"/>
-            </a:endParaRPr>
-          </a:p>
-          <a:p>
-            <a:pPr marL="344170">
-              <a:lnSpc>
-                <a:spcPct val="100000"/>
-              </a:lnSpc>
-            </a:pPr>
-            <a:r>
-              <a:rPr sz="2000" dirty="0">
-                <a:latin typeface="Times New Roman"/>
-                <a:cs typeface="Times New Roman"/>
-              </a:rPr>
-              <a:t>My</a:t>
-            </a:r>
-            <a:r>
-              <a:rPr sz="2000" spc="-30" dirty="0">
-                <a:latin typeface="Times New Roman"/>
-                <a:cs typeface="Times New Roman"/>
-              </a:rPr>
-              <a:t> </a:t>
-            </a:r>
-            <a:r>
-              <a:rPr sz="2000" dirty="0">
-                <a:latin typeface="Times New Roman"/>
-                <a:cs typeface="Times New Roman"/>
-              </a:rPr>
-              <a:t>Private</a:t>
-            </a:r>
-            <a:r>
-              <a:rPr sz="2000" spc="-50" dirty="0">
-                <a:latin typeface="Times New Roman"/>
-                <a:cs typeface="Times New Roman"/>
-              </a:rPr>
-              <a:t> </a:t>
-            </a:r>
-            <a:r>
-              <a:rPr sz="2000" spc="-25" dirty="0">
-                <a:latin typeface="Times New Roman"/>
-                <a:cs typeface="Times New Roman"/>
-              </a:rPr>
-              <a:t>Key</a:t>
-            </a:r>
-            <a:endParaRPr sz="2000" dirty="0">
-              <a:latin typeface="Times New Roman"/>
-              <a:cs typeface="Times New Roman"/>
-            </a:endParaRPr>
-          </a:p>
-        </p:txBody>
-      </p:sp>
-      <p:sp>
-        <p:nvSpPr>
-          <p:cNvPr id="8" name="object 15">
-            <a:extLst>
-              <a:ext uri="{FF2B5EF4-FFF2-40B4-BE49-F238E27FC236}">
-                <a16:creationId xmlns:a16="http://schemas.microsoft.com/office/drawing/2014/main" id="{58DD8CD7-A846-8915-125E-A7021DB37239}"/>
-              </a:ext>
-            </a:extLst>
-          </p:cNvPr>
-          <p:cNvSpPr txBox="1"/>
-          <p:nvPr/>
-        </p:nvSpPr>
-        <p:spPr>
-          <a:xfrm>
-            <a:off x="5917386" y="6280253"/>
-            <a:ext cx="1720214" cy="330200"/>
-          </a:xfrm>
-          <a:prstGeom prst="rect">
-            <a:avLst/>
-          </a:prstGeom>
-        </p:spPr>
-        <p:txBody>
-          <a:bodyPr vert="horz" wrap="square" lIns="0" tIns="12065" rIns="0" bIns="0" rtlCol="0">
-            <a:spAutoFit/>
-          </a:bodyPr>
-          <a:lstStyle/>
-          <a:p>
-            <a:pPr marL="12700">
-              <a:lnSpc>
-                <a:spcPct val="100000"/>
-              </a:lnSpc>
-              <a:spcBef>
-                <a:spcPts val="95"/>
-              </a:spcBef>
-            </a:pPr>
-            <a:r>
-              <a:rPr sz="2000" spc="-45" dirty="0">
-                <a:latin typeface="Times New Roman"/>
-                <a:cs typeface="Times New Roman"/>
-              </a:rPr>
-              <a:t>Your</a:t>
-            </a:r>
-            <a:r>
-              <a:rPr sz="2000" spc="-60" dirty="0">
-                <a:latin typeface="Times New Roman"/>
-                <a:cs typeface="Times New Roman"/>
-              </a:rPr>
-              <a:t> </a:t>
-            </a:r>
-            <a:r>
-              <a:rPr sz="2000" dirty="0">
-                <a:latin typeface="Times New Roman"/>
-                <a:cs typeface="Times New Roman"/>
-              </a:rPr>
-              <a:t>Public</a:t>
-            </a:r>
-            <a:r>
-              <a:rPr sz="2000" spc="-65" dirty="0">
-                <a:latin typeface="Times New Roman"/>
-                <a:cs typeface="Times New Roman"/>
-              </a:rPr>
-              <a:t> </a:t>
-            </a:r>
-            <a:r>
-              <a:rPr sz="2000" spc="-25" dirty="0">
-                <a:latin typeface="Times New Roman"/>
-                <a:cs typeface="Times New Roman"/>
-              </a:rPr>
-              <a:t>Key</a:t>
-            </a:r>
-            <a:endParaRPr sz="2000">
-              <a:latin typeface="Times New Roman"/>
-              <a:cs typeface="Times New Roman"/>
-            </a:endParaRPr>
-          </a:p>
-        </p:txBody>
-      </p:sp>
-      <p:pic>
-        <p:nvPicPr>
-          <p:cNvPr id="9" name="object 16">
-            <a:extLst>
-              <a:ext uri="{FF2B5EF4-FFF2-40B4-BE49-F238E27FC236}">
-                <a16:creationId xmlns:a16="http://schemas.microsoft.com/office/drawing/2014/main" id="{70A09498-DFAE-A10D-4807-F9FC90B0963F}"/>
-              </a:ext>
-            </a:extLst>
-          </p:cNvPr>
-          <p:cNvPicPr/>
-          <p:nvPr/>
-        </p:nvPicPr>
-        <p:blipFill>
-          <a:blip r:embed="rId4" cstate="print"/>
-          <a:stretch>
-            <a:fillRect/>
-          </a:stretch>
-        </p:blipFill>
-        <p:spPr>
-          <a:xfrm>
-            <a:off x="9317011" y="5953763"/>
-            <a:ext cx="368807" cy="368045"/>
-          </a:xfrm>
-          <a:prstGeom prst="rect">
-            <a:avLst/>
-          </a:prstGeom>
-        </p:spPr>
-      </p:pic>
-      <p:pic>
-        <p:nvPicPr>
-          <p:cNvPr id="10" name="object 17">
-            <a:extLst>
-              <a:ext uri="{FF2B5EF4-FFF2-40B4-BE49-F238E27FC236}">
-                <a16:creationId xmlns:a16="http://schemas.microsoft.com/office/drawing/2014/main" id="{EC2A46FA-C16A-E4E6-E9E7-28A46D0DC9C4}"/>
-              </a:ext>
-            </a:extLst>
-          </p:cNvPr>
-          <p:cNvPicPr/>
-          <p:nvPr/>
-        </p:nvPicPr>
-        <p:blipFill>
-          <a:blip r:embed="rId5" cstate="print"/>
-          <a:stretch>
-            <a:fillRect/>
-          </a:stretch>
-        </p:blipFill>
-        <p:spPr>
-          <a:xfrm>
-            <a:off x="7323818" y="5953763"/>
-            <a:ext cx="259442" cy="368045"/>
           </a:xfrm>
           <a:prstGeom prst="rect">
             <a:avLst/>
@@ -45997,7 +45808,7 @@
         <p:spPr>
           <a:xfrm>
             <a:off x="838200" y="1724027"/>
-            <a:ext cx="11353800" cy="2559034"/>
+            <a:ext cx="11353800" cy="1820370"/>
           </a:xfrm>
           <a:prstGeom prst="rect">
             <a:avLst/>
@@ -46184,27 +45995,6 @@
               <a:t>a</a:t>
             </a:r>
             <a:r>
-              <a:rPr lang="en-US" sz="2400" spc="-10" dirty="0">
-                <a:latin typeface="Times New Roman"/>
-                <a:cs typeface="Times New Roman"/>
-              </a:rPr>
-              <a:t> </a:t>
-            </a:r>
-            <a:r>
-              <a:rPr sz="2400" spc="-10" dirty="0" err="1">
-                <a:latin typeface="Times New Roman"/>
-                <a:cs typeface="Times New Roman"/>
-              </a:rPr>
-              <a:t>ublic_Key</a:t>
-            </a:r>
-            <a:r>
-              <a:rPr lang="en-GB" sz="2400" spc="-10" dirty="0">
-                <a:latin typeface="Times New Roman"/>
-                <a:cs typeface="Times New Roman"/>
-              </a:rPr>
-              <a:t>_Alice</a:t>
-            </a:r>
-            <a:r>
               <a:rPr sz="2400" spc="-10" dirty="0">
                 <a:latin typeface="Times New Roman"/>
                 <a:cs typeface="Times New Roman"/>
@@ -46319,18 +46109,18 @@
               <a:t>Decrypt(</a:t>
             </a:r>
             <a:r>
-              <a:rPr sz="2400" dirty="0" err="1">
-                <a:latin typeface="Times New Roman"/>
-                <a:cs typeface="Times New Roman"/>
-              </a:rPr>
-              <a:t>Public_Key</a:t>
-            </a:r>
-            <a:r>
-              <a:rPr lang="en-GB" sz="2400" dirty="0">
-                <a:latin typeface="Times New Roman"/>
-                <a:cs typeface="Times New Roman"/>
-              </a:rPr>
-              <a:t>_Bob</a:t>
+              <a:rPr lang="en-US" sz="2400" dirty="0" err="1">
+                <a:latin typeface="Times New Roman"/>
+                <a:cs typeface="Times New Roman"/>
+              </a:rPr>
+              <a:t>PU</a:t>
+            </a:r>
+            <a:r>
+              <a:rPr lang="en-US" sz="2400" baseline="-25000" dirty="0" err="1">
+                <a:latin typeface="Times New Roman"/>
+                <a:cs typeface="Times New Roman"/>
+              </a:rPr>
+              <a:t>b</a:t>
             </a:r>
             <a:r>
               <a:rPr sz="2400" dirty="0">
@@ -46354,18 +46144,18 @@
               <a:t>Decrypt(</a:t>
             </a:r>
             <a:r>
-              <a:rPr sz="2400" spc="-10" dirty="0" err="1">
-                <a:latin typeface="Times New Roman"/>
-                <a:cs typeface="Times New Roman"/>
-              </a:rPr>
-              <a:t>Private_Key</a:t>
-            </a:r>
-            <a:r>
-              <a:rPr lang="en-GB" sz="2400" spc="-10" dirty="0">
-                <a:latin typeface="Times New Roman"/>
-                <a:cs typeface="Times New Roman"/>
-              </a:rPr>
-              <a:t>_Alice</a:t>
+              <a:rPr lang="en-US" sz="2400" dirty="0" err="1">
+                <a:latin typeface="Times New Roman"/>
+                <a:cs typeface="Times New Roman"/>
+              </a:rPr>
+              <a:t>PR</a:t>
+            </a:r>
+            <a:r>
+              <a:rPr lang="en-US" sz="2400" baseline="-25000" dirty="0" err="1">
+                <a:latin typeface="Times New Roman"/>
+                <a:cs typeface="Times New Roman"/>
+              </a:rPr>
+              <a:t>a</a:t>
             </a:r>
             <a:r>
               <a:rPr sz="2400" spc="-10" dirty="0">
